--- a/teaching/xiufeng-jhs-grade9-summer2026/slides/01自然概論.pptx
+++ b/teaching/xiufeng-jhs-grade9-summer2026/slides/01自然概論.pptx
@@ -123,6 +123,7 @@
 <p1510:revInfo xmlns:a="http://schemas.openxmlformats.org/drawingml/2006/main" xmlns:r="http://schemas.openxmlformats.org/officeDocument/2006/relationships" xmlns:p1510="http://schemas.microsoft.com/office/powerpoint/2015/10/main">
   <p1510:revLst>
     <p1510:client id="{24576819-C2F2-4210-8C7E-B7B896A858E4}" v="54" dt="2026-07-26T17:50:46.145"/>
+    <p1510:client id="{E767C9AF-E9CD-4704-B08F-1A276BD2FEC3}" v="17" dt="2026-07-26T23:51:39.737"/>
   </p1510:revLst>
 </p1510:revInfo>
 </file>
@@ -132,7 +133,7 @@
   <pc:docChgLst>
     <pc:chgData name="banana fu" userId="ed976ac1ba8285c4" providerId="LiveId" clId="{88AF2FF6-62A1-469D-A392-D5D42FFB82F2}"/>
     <pc:docChg chg="undo custSel addSld modSld">
-      <pc:chgData name="banana fu" userId="ed976ac1ba8285c4" providerId="LiveId" clId="{88AF2FF6-62A1-469D-A392-D5D42FFB82F2}" dt="2026-07-26T17:51:53.347" v="2406" actId="1076"/>
+      <pc:chgData name="banana fu" userId="ed976ac1ba8285c4" providerId="LiveId" clId="{88AF2FF6-62A1-469D-A392-D5D42FFB82F2}" dt="2026-07-26T23:51:39.737" v="2435"/>
       <pc:docMkLst>
         <pc:docMk/>
       </pc:docMkLst>
@@ -175,8 +176,8 @@
           </ac:picMkLst>
         </pc:picChg>
       </pc:sldChg>
-      <pc:sldChg chg="addSp modSp new mod setBg">
-        <pc:chgData name="banana fu" userId="ed976ac1ba8285c4" providerId="LiveId" clId="{88AF2FF6-62A1-469D-A392-D5D42FFB82F2}" dt="2026-07-26T15:06:05.337" v="324" actId="732"/>
+      <pc:sldChg chg="addSp modSp new mod setBg modAnim">
+        <pc:chgData name="banana fu" userId="ed976ac1ba8285c4" providerId="LiveId" clId="{88AF2FF6-62A1-469D-A392-D5D42FFB82F2}" dt="2026-07-26T23:51:39.737" v="2435"/>
         <pc:sldMkLst>
           <pc:docMk/>
           <pc:sldMk cId="3810636414" sldId="257"/>
@@ -206,8 +207,8 @@
           </ac:picMkLst>
         </pc:picChg>
       </pc:sldChg>
-      <pc:sldChg chg="modSp add mod">
-        <pc:chgData name="banana fu" userId="ed976ac1ba8285c4" providerId="LiveId" clId="{88AF2FF6-62A1-469D-A392-D5D42FFB82F2}" dt="2026-07-26T15:10:49.340" v="720" actId="14100"/>
+      <pc:sldChg chg="modSp add mod addAnim delAnim modAnim">
+        <pc:chgData name="banana fu" userId="ed976ac1ba8285c4" providerId="LiveId" clId="{88AF2FF6-62A1-469D-A392-D5D42FFB82F2}" dt="2026-07-26T23:47:44.732" v="2417"/>
         <pc:sldMkLst>
           <pc:docMk/>
           <pc:sldMk cId="1206507492" sldId="258"/>
@@ -419,8 +420,8 @@
           </ac:picMkLst>
         </pc:picChg>
       </pc:sldChg>
-      <pc:sldChg chg="modSp add mod">
-        <pc:chgData name="banana fu" userId="ed976ac1ba8285c4" providerId="LiveId" clId="{88AF2FF6-62A1-469D-A392-D5D42FFB82F2}" dt="2026-07-26T17:48:51.703" v="2374" actId="2710"/>
+      <pc:sldChg chg="modSp add mod addAnim delAnim modAnim">
+        <pc:chgData name="banana fu" userId="ed976ac1ba8285c4" providerId="LiveId" clId="{88AF2FF6-62A1-469D-A392-D5D42FFB82F2}" dt="2026-07-26T23:48:48.188" v="2420"/>
         <pc:sldMkLst>
           <pc:docMk/>
           <pc:sldMk cId="3619498498" sldId="261"/>
@@ -442,8 +443,8 @@
           </ac:spMkLst>
         </pc:spChg>
       </pc:sldChg>
-      <pc:sldChg chg="modSp add mod">
-        <pc:chgData name="banana fu" userId="ed976ac1ba8285c4" providerId="LiveId" clId="{88AF2FF6-62A1-469D-A392-D5D42FFB82F2}" dt="2026-07-26T17:48:41.117" v="2372" actId="14100"/>
+      <pc:sldChg chg="modSp add mod addAnim delAnim modAnim">
+        <pc:chgData name="banana fu" userId="ed976ac1ba8285c4" providerId="LiveId" clId="{88AF2FF6-62A1-469D-A392-D5D42FFB82F2}" dt="2026-07-26T23:49:24.078" v="2423"/>
         <pc:sldMkLst>
           <pc:docMk/>
           <pc:sldMk cId="2554481305" sldId="262"/>
@@ -465,8 +466,8 @@
           </ac:spMkLst>
         </pc:spChg>
       </pc:sldChg>
-      <pc:sldChg chg="modSp add mod">
-        <pc:chgData name="banana fu" userId="ed976ac1ba8285c4" providerId="LiveId" clId="{88AF2FF6-62A1-469D-A392-D5D42FFB82F2}" dt="2026-07-26T17:51:53.347" v="2406" actId="1076"/>
+      <pc:sldChg chg="modSp add mod addAnim delAnim modAnim">
+        <pc:chgData name="banana fu" userId="ed976ac1ba8285c4" providerId="LiveId" clId="{88AF2FF6-62A1-469D-A392-D5D42FFB82F2}" dt="2026-07-26T23:50:44.679" v="2434" actId="20577"/>
         <pc:sldMkLst>
           <pc:docMk/>
           <pc:sldMk cId="1111605474" sldId="263"/>
@@ -480,7 +481,7 @@
           </ac:spMkLst>
         </pc:spChg>
         <pc:spChg chg="mod">
-          <ac:chgData name="banana fu" userId="ed976ac1ba8285c4" providerId="LiveId" clId="{88AF2FF6-62A1-469D-A392-D5D42FFB82F2}" dt="2026-07-26T17:51:53.347" v="2406" actId="1076"/>
+          <ac:chgData name="banana fu" userId="ed976ac1ba8285c4" providerId="LiveId" clId="{88AF2FF6-62A1-469D-A392-D5D42FFB82F2}" dt="2026-07-26T23:50:44.679" v="2434" actId="20577"/>
           <ac:spMkLst>
             <pc:docMk/>
             <pc:sldMk cId="1111605474" sldId="263"/>
@@ -642,7 +643,7 @@
           <a:p>
             <a:fld id="{AB1DF71F-9D72-4750-88FD-CBCE94AF7514}" type="datetimeFigureOut">
               <a:rPr lang="en-US" smtClean="0"/>
-              <a:t>07/26/2026</a:t>
+              <a:t>07/27/2026</a:t>
             </a:fld>
             <a:endParaRPr lang="en-US"/>
           </a:p>
@@ -842,7 +843,7 @@
           <a:p>
             <a:fld id="{AB1DF71F-9D72-4750-88FD-CBCE94AF7514}" type="datetimeFigureOut">
               <a:rPr lang="en-US" smtClean="0"/>
-              <a:t>07/26/2026</a:t>
+              <a:t>07/27/2026</a:t>
             </a:fld>
             <a:endParaRPr lang="en-US"/>
           </a:p>
@@ -1052,7 +1053,7 @@
           <a:p>
             <a:fld id="{AB1DF71F-9D72-4750-88FD-CBCE94AF7514}" type="datetimeFigureOut">
               <a:rPr lang="en-US" smtClean="0"/>
-              <a:t>07/26/2026</a:t>
+              <a:t>07/27/2026</a:t>
             </a:fld>
             <a:endParaRPr lang="en-US"/>
           </a:p>
@@ -1252,7 +1253,7 @@
           <a:p>
             <a:fld id="{AB1DF71F-9D72-4750-88FD-CBCE94AF7514}" type="datetimeFigureOut">
               <a:rPr lang="en-US" smtClean="0"/>
-              <a:t>07/26/2026</a:t>
+              <a:t>07/27/2026</a:t>
             </a:fld>
             <a:endParaRPr lang="en-US"/>
           </a:p>
@@ -1528,7 +1529,7 @@
           <a:p>
             <a:fld id="{AB1DF71F-9D72-4750-88FD-CBCE94AF7514}" type="datetimeFigureOut">
               <a:rPr lang="en-US" smtClean="0"/>
-              <a:t>07/26/2026</a:t>
+              <a:t>07/27/2026</a:t>
             </a:fld>
             <a:endParaRPr lang="en-US"/>
           </a:p>
@@ -1796,7 +1797,7 @@
           <a:p>
             <a:fld id="{AB1DF71F-9D72-4750-88FD-CBCE94AF7514}" type="datetimeFigureOut">
               <a:rPr lang="en-US" smtClean="0"/>
-              <a:t>07/26/2026</a:t>
+              <a:t>07/27/2026</a:t>
             </a:fld>
             <a:endParaRPr lang="en-US"/>
           </a:p>
@@ -2211,7 +2212,7 @@
           <a:p>
             <a:fld id="{AB1DF71F-9D72-4750-88FD-CBCE94AF7514}" type="datetimeFigureOut">
               <a:rPr lang="en-US" smtClean="0"/>
-              <a:t>07/26/2026</a:t>
+              <a:t>07/27/2026</a:t>
             </a:fld>
             <a:endParaRPr lang="en-US"/>
           </a:p>
@@ -2353,7 +2354,7 @@
           <a:p>
             <a:fld id="{AB1DF71F-9D72-4750-88FD-CBCE94AF7514}" type="datetimeFigureOut">
               <a:rPr lang="en-US" smtClean="0"/>
-              <a:t>07/26/2026</a:t>
+              <a:t>07/27/2026</a:t>
             </a:fld>
             <a:endParaRPr lang="en-US"/>
           </a:p>
@@ -2466,7 +2467,7 @@
           <a:p>
             <a:fld id="{AB1DF71F-9D72-4750-88FD-CBCE94AF7514}" type="datetimeFigureOut">
               <a:rPr lang="en-US" smtClean="0"/>
-              <a:t>07/26/2026</a:t>
+              <a:t>07/27/2026</a:t>
             </a:fld>
             <a:endParaRPr lang="en-US"/>
           </a:p>
@@ -2779,7 +2780,7 @@
           <a:p>
             <a:fld id="{AB1DF71F-9D72-4750-88FD-CBCE94AF7514}" type="datetimeFigureOut">
               <a:rPr lang="en-US" smtClean="0"/>
-              <a:t>07/26/2026</a:t>
+              <a:t>07/27/2026</a:t>
             </a:fld>
             <a:endParaRPr lang="en-US"/>
           </a:p>
@@ -3068,7 +3069,7 @@
           <a:p>
             <a:fld id="{AB1DF71F-9D72-4750-88FD-CBCE94AF7514}" type="datetimeFigureOut">
               <a:rPr lang="en-US" smtClean="0"/>
-              <a:t>07/26/2026</a:t>
+              <a:t>07/27/2026</a:t>
             </a:fld>
             <a:endParaRPr lang="en-US"/>
           </a:p>
@@ -3311,7 +3312,7 @@
           <a:p>
             <a:fld id="{AB1DF71F-9D72-4750-88FD-CBCE94AF7514}" type="datetimeFigureOut">
               <a:rPr lang="en-US" smtClean="0"/>
-              <a:t>07/26/2026</a:t>
+              <a:t>07/27/2026</a:t>
             </a:fld>
             <a:endParaRPr lang="en-US"/>
           </a:p>
@@ -4071,6 +4072,283 @@
   <p:clrMapOvr>
     <a:masterClrMapping/>
   </p:clrMapOvr>
+  <p:timing>
+    <p:tnLst>
+      <p:par>
+        <p:cTn id="1" dur="indefinite" restart="never" nodeType="tmRoot">
+          <p:childTnLst>
+            <p:seq concurrent="1" nextAc="seek">
+              <p:cTn id="2" dur="indefinite" nodeType="mainSeq">
+                <p:childTnLst>
+                  <p:par>
+                    <p:cTn id="3" fill="hold">
+                      <p:stCondLst>
+                        <p:cond delay="indefinite"/>
+                      </p:stCondLst>
+                      <p:childTnLst>
+                        <p:par>
+                          <p:cTn id="4" fill="hold">
+                            <p:stCondLst>
+                              <p:cond delay="0"/>
+                            </p:stCondLst>
+                            <p:childTnLst>
+                              <p:par>
+                                <p:cTn id="5" presetID="10" presetClass="entr" presetSubtype="0" fill="hold" grpId="0" nodeType="clickEffect">
+                                  <p:stCondLst>
+                                    <p:cond delay="0"/>
+                                  </p:stCondLst>
+                                  <p:childTnLst>
+                                    <p:set>
+                                      <p:cBhvr>
+                                        <p:cTn id="6" dur="1" fill="hold">
+                                          <p:stCondLst>
+                                            <p:cond delay="0"/>
+                                          </p:stCondLst>
+                                        </p:cTn>
+                                        <p:tgtEl>
+                                          <p:spTgt spid="3">
+                                            <p:txEl>
+                                              <p:pRg st="0" end="0"/>
+                                            </p:txEl>
+                                          </p:spTgt>
+                                        </p:tgtEl>
+                                        <p:attrNameLst>
+                                          <p:attrName>style.visibility</p:attrName>
+                                        </p:attrNameLst>
+                                      </p:cBhvr>
+                                      <p:to>
+                                        <p:strVal val="visible"/>
+                                      </p:to>
+                                    </p:set>
+                                    <p:animEffect transition="in" filter="fade">
+                                      <p:cBhvr>
+                                        <p:cTn id="7" dur="500"/>
+                                        <p:tgtEl>
+                                          <p:spTgt spid="3">
+                                            <p:txEl>
+                                              <p:pRg st="0" end="0"/>
+                                            </p:txEl>
+                                          </p:spTgt>
+                                        </p:tgtEl>
+                                      </p:cBhvr>
+                                    </p:animEffect>
+                                  </p:childTnLst>
+                                </p:cTn>
+                              </p:par>
+                            </p:childTnLst>
+                          </p:cTn>
+                        </p:par>
+                      </p:childTnLst>
+                    </p:cTn>
+                  </p:par>
+                  <p:par>
+                    <p:cTn id="8" fill="hold">
+                      <p:stCondLst>
+                        <p:cond delay="indefinite"/>
+                      </p:stCondLst>
+                      <p:childTnLst>
+                        <p:par>
+                          <p:cTn id="9" fill="hold">
+                            <p:stCondLst>
+                              <p:cond delay="0"/>
+                            </p:stCondLst>
+                            <p:childTnLst>
+                              <p:par>
+                                <p:cTn id="10" presetID="10" presetClass="entr" presetSubtype="0" fill="hold" grpId="0" nodeType="clickEffect">
+                                  <p:stCondLst>
+                                    <p:cond delay="0"/>
+                                  </p:stCondLst>
+                                  <p:childTnLst>
+                                    <p:set>
+                                      <p:cBhvr>
+                                        <p:cTn id="11" dur="1" fill="hold">
+                                          <p:stCondLst>
+                                            <p:cond delay="0"/>
+                                          </p:stCondLst>
+                                        </p:cTn>
+                                        <p:tgtEl>
+                                          <p:spTgt spid="3">
+                                            <p:txEl>
+                                              <p:pRg st="2" end="2"/>
+                                            </p:txEl>
+                                          </p:spTgt>
+                                        </p:tgtEl>
+                                        <p:attrNameLst>
+                                          <p:attrName>style.visibility</p:attrName>
+                                        </p:attrNameLst>
+                                      </p:cBhvr>
+                                      <p:to>
+                                        <p:strVal val="visible"/>
+                                      </p:to>
+                                    </p:set>
+                                    <p:animEffect transition="in" filter="fade">
+                                      <p:cBhvr>
+                                        <p:cTn id="12" dur="500"/>
+                                        <p:tgtEl>
+                                          <p:spTgt spid="3">
+                                            <p:txEl>
+                                              <p:pRg st="2" end="2"/>
+                                            </p:txEl>
+                                          </p:spTgt>
+                                        </p:tgtEl>
+                                      </p:cBhvr>
+                                    </p:animEffect>
+                                  </p:childTnLst>
+                                </p:cTn>
+                              </p:par>
+                            </p:childTnLst>
+                          </p:cTn>
+                        </p:par>
+                      </p:childTnLst>
+                    </p:cTn>
+                  </p:par>
+                  <p:par>
+                    <p:cTn id="13" fill="hold">
+                      <p:stCondLst>
+                        <p:cond delay="indefinite"/>
+                      </p:stCondLst>
+                      <p:childTnLst>
+                        <p:par>
+                          <p:cTn id="14" fill="hold">
+                            <p:stCondLst>
+                              <p:cond delay="0"/>
+                            </p:stCondLst>
+                            <p:childTnLst>
+                              <p:par>
+                                <p:cTn id="15" presetID="10" presetClass="entr" presetSubtype="0" fill="hold" grpId="0" nodeType="clickEffect">
+                                  <p:stCondLst>
+                                    <p:cond delay="0"/>
+                                  </p:stCondLst>
+                                  <p:childTnLst>
+                                    <p:set>
+                                      <p:cBhvr>
+                                        <p:cTn id="16" dur="1" fill="hold">
+                                          <p:stCondLst>
+                                            <p:cond delay="0"/>
+                                          </p:stCondLst>
+                                        </p:cTn>
+                                        <p:tgtEl>
+                                          <p:spTgt spid="3">
+                                            <p:txEl>
+                                              <p:pRg st="3" end="3"/>
+                                            </p:txEl>
+                                          </p:spTgt>
+                                        </p:tgtEl>
+                                        <p:attrNameLst>
+                                          <p:attrName>style.visibility</p:attrName>
+                                        </p:attrNameLst>
+                                      </p:cBhvr>
+                                      <p:to>
+                                        <p:strVal val="visible"/>
+                                      </p:to>
+                                    </p:set>
+                                    <p:animEffect transition="in" filter="fade">
+                                      <p:cBhvr>
+                                        <p:cTn id="17" dur="500"/>
+                                        <p:tgtEl>
+                                          <p:spTgt spid="3">
+                                            <p:txEl>
+                                              <p:pRg st="3" end="3"/>
+                                            </p:txEl>
+                                          </p:spTgt>
+                                        </p:tgtEl>
+                                      </p:cBhvr>
+                                    </p:animEffect>
+                                  </p:childTnLst>
+                                </p:cTn>
+                              </p:par>
+                            </p:childTnLst>
+                          </p:cTn>
+                        </p:par>
+                      </p:childTnLst>
+                    </p:cTn>
+                  </p:par>
+                  <p:par>
+                    <p:cTn id="18" fill="hold">
+                      <p:stCondLst>
+                        <p:cond delay="indefinite"/>
+                      </p:stCondLst>
+                      <p:childTnLst>
+                        <p:par>
+                          <p:cTn id="19" fill="hold">
+                            <p:stCondLst>
+                              <p:cond delay="0"/>
+                            </p:stCondLst>
+                            <p:childTnLst>
+                              <p:par>
+                                <p:cTn id="20" presetID="10" presetClass="entr" presetSubtype="0" fill="hold" grpId="0" nodeType="clickEffect">
+                                  <p:stCondLst>
+                                    <p:cond delay="0"/>
+                                  </p:stCondLst>
+                                  <p:childTnLst>
+                                    <p:set>
+                                      <p:cBhvr>
+                                        <p:cTn id="21" dur="1" fill="hold">
+                                          <p:stCondLst>
+                                            <p:cond delay="0"/>
+                                          </p:stCondLst>
+                                        </p:cTn>
+                                        <p:tgtEl>
+                                          <p:spTgt spid="3">
+                                            <p:txEl>
+                                              <p:pRg st="5" end="5"/>
+                                            </p:txEl>
+                                          </p:spTgt>
+                                        </p:tgtEl>
+                                        <p:attrNameLst>
+                                          <p:attrName>style.visibility</p:attrName>
+                                        </p:attrNameLst>
+                                      </p:cBhvr>
+                                      <p:to>
+                                        <p:strVal val="visible"/>
+                                      </p:to>
+                                    </p:set>
+                                    <p:animEffect transition="in" filter="fade">
+                                      <p:cBhvr>
+                                        <p:cTn id="22" dur="500"/>
+                                        <p:tgtEl>
+                                          <p:spTgt spid="3">
+                                            <p:txEl>
+                                              <p:pRg st="5" end="5"/>
+                                            </p:txEl>
+                                          </p:spTgt>
+                                        </p:tgtEl>
+                                      </p:cBhvr>
+                                    </p:animEffect>
+                                  </p:childTnLst>
+                                </p:cTn>
+                              </p:par>
+                            </p:childTnLst>
+                          </p:cTn>
+                        </p:par>
+                      </p:childTnLst>
+                    </p:cTn>
+                  </p:par>
+                </p:childTnLst>
+              </p:cTn>
+              <p:prevCondLst>
+                <p:cond evt="onPrev" delay="0">
+                  <p:tgtEl>
+                    <p:sldTgt/>
+                  </p:tgtEl>
+                </p:cond>
+              </p:prevCondLst>
+              <p:nextCondLst>
+                <p:cond evt="onNext" delay="0">
+                  <p:tgtEl>
+                    <p:sldTgt/>
+                  </p:tgtEl>
+                </p:cond>
+              </p:nextCondLst>
+            </p:seq>
+          </p:childTnLst>
+        </p:cTn>
+      </p:par>
+    </p:tnLst>
+    <p:bldLst>
+      <p:bldP spid="3" grpId="0" uiExpand="1" build="p"/>
+    </p:bldLst>
+  </p:timing>
 </p:sld>
 </file>
 
@@ -4294,6 +4572,384 @@
   <p:clrMapOvr>
     <a:masterClrMapping/>
   </p:clrMapOvr>
+  <p:timing>
+    <p:tnLst>
+      <p:par>
+        <p:cTn id="1" dur="indefinite" restart="never" nodeType="tmRoot">
+          <p:childTnLst>
+            <p:seq concurrent="1" nextAc="seek">
+              <p:cTn id="2" dur="indefinite" nodeType="mainSeq">
+                <p:childTnLst>
+                  <p:par>
+                    <p:cTn id="3" fill="hold">
+                      <p:stCondLst>
+                        <p:cond delay="indefinite"/>
+                      </p:stCondLst>
+                      <p:childTnLst>
+                        <p:par>
+                          <p:cTn id="4" fill="hold">
+                            <p:stCondLst>
+                              <p:cond delay="0"/>
+                            </p:stCondLst>
+                            <p:childTnLst>
+                              <p:par>
+                                <p:cTn id="5" presetID="10" presetClass="entr" presetSubtype="0" fill="hold" nodeType="clickEffect">
+                                  <p:stCondLst>
+                                    <p:cond delay="0"/>
+                                  </p:stCondLst>
+                                  <p:childTnLst>
+                                    <p:set>
+                                      <p:cBhvr>
+                                        <p:cTn id="6" dur="1" fill="hold">
+                                          <p:stCondLst>
+                                            <p:cond delay="0"/>
+                                          </p:stCondLst>
+                                        </p:cTn>
+                                        <p:tgtEl>
+                                          <p:spTgt spid="3">
+                                            <p:txEl>
+                                              <p:pRg st="0" end="0"/>
+                                            </p:txEl>
+                                          </p:spTgt>
+                                        </p:tgtEl>
+                                        <p:attrNameLst>
+                                          <p:attrName>style.visibility</p:attrName>
+                                        </p:attrNameLst>
+                                      </p:cBhvr>
+                                      <p:to>
+                                        <p:strVal val="visible"/>
+                                      </p:to>
+                                    </p:set>
+                                    <p:animEffect transition="in" filter="fade">
+                                      <p:cBhvr>
+                                        <p:cTn id="7" dur="500"/>
+                                        <p:tgtEl>
+                                          <p:spTgt spid="3">
+                                            <p:txEl>
+                                              <p:pRg st="0" end="0"/>
+                                            </p:txEl>
+                                          </p:spTgt>
+                                        </p:tgtEl>
+                                      </p:cBhvr>
+                                    </p:animEffect>
+                                  </p:childTnLst>
+                                </p:cTn>
+                              </p:par>
+                            </p:childTnLst>
+                          </p:cTn>
+                        </p:par>
+                        <p:par>
+                          <p:cTn id="8" fill="hold">
+                            <p:stCondLst>
+                              <p:cond delay="500"/>
+                            </p:stCondLst>
+                            <p:childTnLst>
+                              <p:par>
+                                <p:cTn id="9" presetID="10" presetClass="entr" presetSubtype="0" fill="hold" nodeType="afterEffect">
+                                  <p:stCondLst>
+                                    <p:cond delay="0"/>
+                                  </p:stCondLst>
+                                  <p:childTnLst>
+                                    <p:set>
+                                      <p:cBhvr>
+                                        <p:cTn id="10" dur="1" fill="hold">
+                                          <p:stCondLst>
+                                            <p:cond delay="0"/>
+                                          </p:stCondLst>
+                                        </p:cTn>
+                                        <p:tgtEl>
+                                          <p:spTgt spid="3">
+                                            <p:txEl>
+                                              <p:pRg st="2" end="2"/>
+                                            </p:txEl>
+                                          </p:spTgt>
+                                        </p:tgtEl>
+                                        <p:attrNameLst>
+                                          <p:attrName>style.visibility</p:attrName>
+                                        </p:attrNameLst>
+                                      </p:cBhvr>
+                                      <p:to>
+                                        <p:strVal val="visible"/>
+                                      </p:to>
+                                    </p:set>
+                                    <p:animEffect transition="in" filter="fade">
+                                      <p:cBhvr>
+                                        <p:cTn id="11" dur="500"/>
+                                        <p:tgtEl>
+                                          <p:spTgt spid="3">
+                                            <p:txEl>
+                                              <p:pRg st="2" end="2"/>
+                                            </p:txEl>
+                                          </p:spTgt>
+                                        </p:tgtEl>
+                                      </p:cBhvr>
+                                    </p:animEffect>
+                                  </p:childTnLst>
+                                </p:cTn>
+                              </p:par>
+                            </p:childTnLst>
+                          </p:cTn>
+                        </p:par>
+                        <p:par>
+                          <p:cTn id="12" fill="hold">
+                            <p:stCondLst>
+                              <p:cond delay="1000"/>
+                            </p:stCondLst>
+                            <p:childTnLst>
+                              <p:par>
+                                <p:cTn id="13" presetID="10" presetClass="entr" presetSubtype="0" fill="hold" nodeType="afterEffect">
+                                  <p:stCondLst>
+                                    <p:cond delay="0"/>
+                                  </p:stCondLst>
+                                  <p:childTnLst>
+                                    <p:set>
+                                      <p:cBhvr>
+                                        <p:cTn id="14" dur="1" fill="hold">
+                                          <p:stCondLst>
+                                            <p:cond delay="0"/>
+                                          </p:stCondLst>
+                                        </p:cTn>
+                                        <p:tgtEl>
+                                          <p:spTgt spid="3">
+                                            <p:txEl>
+                                              <p:pRg st="4" end="4"/>
+                                            </p:txEl>
+                                          </p:spTgt>
+                                        </p:tgtEl>
+                                        <p:attrNameLst>
+                                          <p:attrName>style.visibility</p:attrName>
+                                        </p:attrNameLst>
+                                      </p:cBhvr>
+                                      <p:to>
+                                        <p:strVal val="visible"/>
+                                      </p:to>
+                                    </p:set>
+                                    <p:animEffect transition="in" filter="fade">
+                                      <p:cBhvr>
+                                        <p:cTn id="15" dur="500"/>
+                                        <p:tgtEl>
+                                          <p:spTgt spid="3">
+                                            <p:txEl>
+                                              <p:pRg st="4" end="4"/>
+                                            </p:txEl>
+                                          </p:spTgt>
+                                        </p:tgtEl>
+                                      </p:cBhvr>
+                                    </p:animEffect>
+                                  </p:childTnLst>
+                                </p:cTn>
+                              </p:par>
+                            </p:childTnLst>
+                          </p:cTn>
+                        </p:par>
+                      </p:childTnLst>
+                    </p:cTn>
+                  </p:par>
+                  <p:par>
+                    <p:cTn id="16" fill="hold">
+                      <p:stCondLst>
+                        <p:cond delay="indefinite"/>
+                      </p:stCondLst>
+                      <p:childTnLst>
+                        <p:par>
+                          <p:cTn id="17" fill="hold">
+                            <p:stCondLst>
+                              <p:cond delay="0"/>
+                            </p:stCondLst>
+                            <p:childTnLst>
+                              <p:par>
+                                <p:cTn id="18" presetID="10" presetClass="entr" presetSubtype="0" fill="hold" nodeType="clickEffect">
+                                  <p:stCondLst>
+                                    <p:cond delay="0"/>
+                                  </p:stCondLst>
+                                  <p:childTnLst>
+                                    <p:set>
+                                      <p:cBhvr>
+                                        <p:cTn id="19" dur="1" fill="hold">
+                                          <p:stCondLst>
+                                            <p:cond delay="0"/>
+                                          </p:stCondLst>
+                                        </p:cTn>
+                                        <p:tgtEl>
+                                          <p:spTgt spid="3">
+                                            <p:txEl>
+                                              <p:pRg st="1" end="1"/>
+                                            </p:txEl>
+                                          </p:spTgt>
+                                        </p:tgtEl>
+                                        <p:attrNameLst>
+                                          <p:attrName>style.visibility</p:attrName>
+                                        </p:attrNameLst>
+                                      </p:cBhvr>
+                                      <p:to>
+                                        <p:strVal val="visible"/>
+                                      </p:to>
+                                    </p:set>
+                                    <p:animEffect transition="in" filter="fade">
+                                      <p:cBhvr>
+                                        <p:cTn id="20" dur="500"/>
+                                        <p:tgtEl>
+                                          <p:spTgt spid="3">
+                                            <p:txEl>
+                                              <p:pRg st="1" end="1"/>
+                                            </p:txEl>
+                                          </p:spTgt>
+                                        </p:tgtEl>
+                                      </p:cBhvr>
+                                    </p:animEffect>
+                                  </p:childTnLst>
+                                </p:cTn>
+                              </p:par>
+                            </p:childTnLst>
+                          </p:cTn>
+                        </p:par>
+                      </p:childTnLst>
+                    </p:cTn>
+                  </p:par>
+                  <p:par>
+                    <p:cTn id="21" fill="hold">
+                      <p:stCondLst>
+                        <p:cond delay="indefinite"/>
+                      </p:stCondLst>
+                      <p:childTnLst>
+                        <p:par>
+                          <p:cTn id="22" fill="hold">
+                            <p:stCondLst>
+                              <p:cond delay="0"/>
+                            </p:stCondLst>
+                            <p:childTnLst>
+                              <p:par>
+                                <p:cTn id="23" presetID="10" presetClass="entr" presetSubtype="0" fill="hold" nodeType="clickEffect">
+                                  <p:stCondLst>
+                                    <p:cond delay="0"/>
+                                  </p:stCondLst>
+                                  <p:childTnLst>
+                                    <p:set>
+                                      <p:cBhvr>
+                                        <p:cTn id="24" dur="1" fill="hold">
+                                          <p:stCondLst>
+                                            <p:cond delay="0"/>
+                                          </p:stCondLst>
+                                        </p:cTn>
+                                        <p:tgtEl>
+                                          <p:spTgt spid="3">
+                                            <p:txEl>
+                                              <p:pRg st="3" end="3"/>
+                                            </p:txEl>
+                                          </p:spTgt>
+                                        </p:tgtEl>
+                                        <p:attrNameLst>
+                                          <p:attrName>style.visibility</p:attrName>
+                                        </p:attrNameLst>
+                                      </p:cBhvr>
+                                      <p:to>
+                                        <p:strVal val="visible"/>
+                                      </p:to>
+                                    </p:set>
+                                    <p:animEffect transition="in" filter="fade">
+                                      <p:cBhvr>
+                                        <p:cTn id="25" dur="500"/>
+                                        <p:tgtEl>
+                                          <p:spTgt spid="3">
+                                            <p:txEl>
+                                              <p:pRg st="3" end="3"/>
+                                            </p:txEl>
+                                          </p:spTgt>
+                                        </p:tgtEl>
+                                      </p:cBhvr>
+                                    </p:animEffect>
+                                  </p:childTnLst>
+                                </p:cTn>
+                              </p:par>
+                            </p:childTnLst>
+                          </p:cTn>
+                        </p:par>
+                      </p:childTnLst>
+                    </p:cTn>
+                  </p:par>
+                  <p:par>
+                    <p:cTn id="26" fill="hold">
+                      <p:stCondLst>
+                        <p:cond delay="indefinite"/>
+                      </p:stCondLst>
+                      <p:childTnLst>
+                        <p:par>
+                          <p:cTn id="27" fill="hold">
+                            <p:stCondLst>
+                              <p:cond delay="0"/>
+                            </p:stCondLst>
+                            <p:childTnLst>
+                              <p:par>
+                                <p:cTn id="28" presetID="10" presetClass="entr" presetSubtype="0" fill="hold" nodeType="clickEffect">
+                                  <p:stCondLst>
+                                    <p:cond delay="0"/>
+                                  </p:stCondLst>
+                                  <p:childTnLst>
+                                    <p:set>
+                                      <p:cBhvr>
+                                        <p:cTn id="29" dur="1" fill="hold">
+                                          <p:stCondLst>
+                                            <p:cond delay="0"/>
+                                          </p:stCondLst>
+                                        </p:cTn>
+                                        <p:tgtEl>
+                                          <p:spTgt spid="3">
+                                            <p:txEl>
+                                              <p:pRg st="5" end="5"/>
+                                            </p:txEl>
+                                          </p:spTgt>
+                                        </p:tgtEl>
+                                        <p:attrNameLst>
+                                          <p:attrName>style.visibility</p:attrName>
+                                        </p:attrNameLst>
+                                      </p:cBhvr>
+                                      <p:to>
+                                        <p:strVal val="visible"/>
+                                      </p:to>
+                                    </p:set>
+                                    <p:animEffect transition="in" filter="fade">
+                                      <p:cBhvr>
+                                        <p:cTn id="30" dur="500"/>
+                                        <p:tgtEl>
+                                          <p:spTgt spid="3">
+                                            <p:txEl>
+                                              <p:pRg st="5" end="5"/>
+                                            </p:txEl>
+                                          </p:spTgt>
+                                        </p:tgtEl>
+                                      </p:cBhvr>
+                                    </p:animEffect>
+                                  </p:childTnLst>
+                                </p:cTn>
+                              </p:par>
+                            </p:childTnLst>
+                          </p:cTn>
+                        </p:par>
+                      </p:childTnLst>
+                    </p:cTn>
+                  </p:par>
+                </p:childTnLst>
+              </p:cTn>
+              <p:prevCondLst>
+                <p:cond evt="onPrev" delay="0">
+                  <p:tgtEl>
+                    <p:sldTgt/>
+                  </p:tgtEl>
+                </p:cond>
+              </p:prevCondLst>
+              <p:nextCondLst>
+                <p:cond evt="onNext" delay="0">
+                  <p:tgtEl>
+                    <p:sldTgt/>
+                  </p:tgtEl>
+                </p:cond>
+              </p:nextCondLst>
+            </p:seq>
+          </p:childTnLst>
+        </p:cTn>
+      </p:par>
+    </p:tnLst>
+  </p:timing>
 </p:sld>
 </file>
 
@@ -5850,6 +6506,314 @@
   <p:clrMapOvr>
     <a:masterClrMapping/>
   </p:clrMapOvr>
+  <p:timing>
+    <p:tnLst>
+      <p:par>
+        <p:cTn id="1" dur="indefinite" restart="never" nodeType="tmRoot">
+          <p:childTnLst>
+            <p:seq concurrent="1" nextAc="seek">
+              <p:cTn id="2" dur="indefinite" nodeType="mainSeq">
+                <p:childTnLst>
+                  <p:par>
+                    <p:cTn id="3" fill="hold">
+                      <p:stCondLst>
+                        <p:cond delay="indefinite"/>
+                      </p:stCondLst>
+                      <p:childTnLst>
+                        <p:par>
+                          <p:cTn id="4" fill="hold">
+                            <p:stCondLst>
+                              <p:cond delay="0"/>
+                            </p:stCondLst>
+                            <p:childTnLst>
+                              <p:par>
+                                <p:cTn id="5" presetID="10" presetClass="entr" presetSubtype="0" fill="hold" nodeType="clickEffect">
+                                  <p:stCondLst>
+                                    <p:cond delay="0"/>
+                                  </p:stCondLst>
+                                  <p:childTnLst>
+                                    <p:set>
+                                      <p:cBhvr>
+                                        <p:cTn id="6" dur="1" fill="hold">
+                                          <p:stCondLst>
+                                            <p:cond delay="0"/>
+                                          </p:stCondLst>
+                                        </p:cTn>
+                                        <p:tgtEl>
+                                          <p:spTgt spid="3">
+                                            <p:txEl>
+                                              <p:pRg st="0" end="0"/>
+                                            </p:txEl>
+                                          </p:spTgt>
+                                        </p:tgtEl>
+                                        <p:attrNameLst>
+                                          <p:attrName>style.visibility</p:attrName>
+                                        </p:attrNameLst>
+                                      </p:cBhvr>
+                                      <p:to>
+                                        <p:strVal val="visible"/>
+                                      </p:to>
+                                    </p:set>
+                                    <p:animEffect transition="in" filter="fade">
+                                      <p:cBhvr>
+                                        <p:cTn id="7" dur="500"/>
+                                        <p:tgtEl>
+                                          <p:spTgt spid="3">
+                                            <p:txEl>
+                                              <p:pRg st="0" end="0"/>
+                                            </p:txEl>
+                                          </p:spTgt>
+                                        </p:tgtEl>
+                                      </p:cBhvr>
+                                    </p:animEffect>
+                                  </p:childTnLst>
+                                </p:cTn>
+                              </p:par>
+                            </p:childTnLst>
+                          </p:cTn>
+                        </p:par>
+                      </p:childTnLst>
+                    </p:cTn>
+                  </p:par>
+                  <p:par>
+                    <p:cTn id="8" fill="hold">
+                      <p:stCondLst>
+                        <p:cond delay="indefinite"/>
+                      </p:stCondLst>
+                      <p:childTnLst>
+                        <p:par>
+                          <p:cTn id="9" fill="hold">
+                            <p:stCondLst>
+                              <p:cond delay="0"/>
+                            </p:stCondLst>
+                            <p:childTnLst>
+                              <p:par>
+                                <p:cTn id="10" presetID="10" presetClass="entr" presetSubtype="0" fill="hold" nodeType="clickEffect">
+                                  <p:stCondLst>
+                                    <p:cond delay="0"/>
+                                  </p:stCondLst>
+                                  <p:childTnLst>
+                                    <p:set>
+                                      <p:cBhvr>
+                                        <p:cTn id="11" dur="1" fill="hold">
+                                          <p:stCondLst>
+                                            <p:cond delay="0"/>
+                                          </p:stCondLst>
+                                        </p:cTn>
+                                        <p:tgtEl>
+                                          <p:spTgt spid="3">
+                                            <p:txEl>
+                                              <p:pRg st="1" end="1"/>
+                                            </p:txEl>
+                                          </p:spTgt>
+                                        </p:tgtEl>
+                                        <p:attrNameLst>
+                                          <p:attrName>style.visibility</p:attrName>
+                                        </p:attrNameLst>
+                                      </p:cBhvr>
+                                      <p:to>
+                                        <p:strVal val="visible"/>
+                                      </p:to>
+                                    </p:set>
+                                    <p:animEffect transition="in" filter="fade">
+                                      <p:cBhvr>
+                                        <p:cTn id="12" dur="500"/>
+                                        <p:tgtEl>
+                                          <p:spTgt spid="3">
+                                            <p:txEl>
+                                              <p:pRg st="1" end="1"/>
+                                            </p:txEl>
+                                          </p:spTgt>
+                                        </p:tgtEl>
+                                      </p:cBhvr>
+                                    </p:animEffect>
+                                  </p:childTnLst>
+                                </p:cTn>
+                              </p:par>
+                            </p:childTnLst>
+                          </p:cTn>
+                        </p:par>
+                        <p:par>
+                          <p:cTn id="13" fill="hold">
+                            <p:stCondLst>
+                              <p:cond delay="500"/>
+                            </p:stCondLst>
+                            <p:childTnLst>
+                              <p:par>
+                                <p:cTn id="14" presetID="10" presetClass="entr" presetSubtype="0" fill="hold" nodeType="afterEffect">
+                                  <p:stCondLst>
+                                    <p:cond delay="0"/>
+                                  </p:stCondLst>
+                                  <p:childTnLst>
+                                    <p:set>
+                                      <p:cBhvr>
+                                        <p:cTn id="15" dur="1" fill="hold">
+                                          <p:stCondLst>
+                                            <p:cond delay="0"/>
+                                          </p:stCondLst>
+                                        </p:cTn>
+                                        <p:tgtEl>
+                                          <p:spTgt spid="3">
+                                            <p:txEl>
+                                              <p:pRg st="2" end="2"/>
+                                            </p:txEl>
+                                          </p:spTgt>
+                                        </p:tgtEl>
+                                        <p:attrNameLst>
+                                          <p:attrName>style.visibility</p:attrName>
+                                        </p:attrNameLst>
+                                      </p:cBhvr>
+                                      <p:to>
+                                        <p:strVal val="visible"/>
+                                      </p:to>
+                                    </p:set>
+                                    <p:animEffect transition="in" filter="fade">
+                                      <p:cBhvr>
+                                        <p:cTn id="16" dur="500"/>
+                                        <p:tgtEl>
+                                          <p:spTgt spid="3">
+                                            <p:txEl>
+                                              <p:pRg st="2" end="2"/>
+                                            </p:txEl>
+                                          </p:spTgt>
+                                        </p:tgtEl>
+                                      </p:cBhvr>
+                                    </p:animEffect>
+                                  </p:childTnLst>
+                                </p:cTn>
+                              </p:par>
+                            </p:childTnLst>
+                          </p:cTn>
+                        </p:par>
+                        <p:par>
+                          <p:cTn id="17" fill="hold">
+                            <p:stCondLst>
+                              <p:cond delay="1000"/>
+                            </p:stCondLst>
+                            <p:childTnLst>
+                              <p:par>
+                                <p:cTn id="18" presetID="10" presetClass="entr" presetSubtype="0" fill="hold" nodeType="afterEffect">
+                                  <p:stCondLst>
+                                    <p:cond delay="0"/>
+                                  </p:stCondLst>
+                                  <p:childTnLst>
+                                    <p:set>
+                                      <p:cBhvr>
+                                        <p:cTn id="19" dur="1" fill="hold">
+                                          <p:stCondLst>
+                                            <p:cond delay="0"/>
+                                          </p:stCondLst>
+                                        </p:cTn>
+                                        <p:tgtEl>
+                                          <p:spTgt spid="3">
+                                            <p:txEl>
+                                              <p:pRg st="3" end="3"/>
+                                            </p:txEl>
+                                          </p:spTgt>
+                                        </p:tgtEl>
+                                        <p:attrNameLst>
+                                          <p:attrName>style.visibility</p:attrName>
+                                        </p:attrNameLst>
+                                      </p:cBhvr>
+                                      <p:to>
+                                        <p:strVal val="visible"/>
+                                      </p:to>
+                                    </p:set>
+                                    <p:animEffect transition="in" filter="fade">
+                                      <p:cBhvr>
+                                        <p:cTn id="20" dur="500"/>
+                                        <p:tgtEl>
+                                          <p:spTgt spid="3">
+                                            <p:txEl>
+                                              <p:pRg st="3" end="3"/>
+                                            </p:txEl>
+                                          </p:spTgt>
+                                        </p:tgtEl>
+                                      </p:cBhvr>
+                                    </p:animEffect>
+                                  </p:childTnLst>
+                                </p:cTn>
+                              </p:par>
+                            </p:childTnLst>
+                          </p:cTn>
+                        </p:par>
+                        <p:par>
+                          <p:cTn id="21" fill="hold">
+                            <p:stCondLst>
+                              <p:cond delay="1500"/>
+                            </p:stCondLst>
+                            <p:childTnLst>
+                              <p:par>
+                                <p:cTn id="22" presetID="10" presetClass="entr" presetSubtype="0" fill="hold" nodeType="afterEffect">
+                                  <p:stCondLst>
+                                    <p:cond delay="0"/>
+                                  </p:stCondLst>
+                                  <p:childTnLst>
+                                    <p:set>
+                                      <p:cBhvr>
+                                        <p:cTn id="23" dur="1" fill="hold">
+                                          <p:stCondLst>
+                                            <p:cond delay="0"/>
+                                          </p:stCondLst>
+                                        </p:cTn>
+                                        <p:tgtEl>
+                                          <p:spTgt spid="3">
+                                            <p:txEl>
+                                              <p:pRg st="4" end="4"/>
+                                            </p:txEl>
+                                          </p:spTgt>
+                                        </p:tgtEl>
+                                        <p:attrNameLst>
+                                          <p:attrName>style.visibility</p:attrName>
+                                        </p:attrNameLst>
+                                      </p:cBhvr>
+                                      <p:to>
+                                        <p:strVal val="visible"/>
+                                      </p:to>
+                                    </p:set>
+                                    <p:animEffect transition="in" filter="fade">
+                                      <p:cBhvr>
+                                        <p:cTn id="24" dur="500"/>
+                                        <p:tgtEl>
+                                          <p:spTgt spid="3">
+                                            <p:txEl>
+                                              <p:pRg st="4" end="4"/>
+                                            </p:txEl>
+                                          </p:spTgt>
+                                        </p:tgtEl>
+                                      </p:cBhvr>
+                                    </p:animEffect>
+                                  </p:childTnLst>
+                                </p:cTn>
+                              </p:par>
+                            </p:childTnLst>
+                          </p:cTn>
+                        </p:par>
+                      </p:childTnLst>
+                    </p:cTn>
+                  </p:par>
+                </p:childTnLst>
+              </p:cTn>
+              <p:prevCondLst>
+                <p:cond evt="onPrev" delay="0">
+                  <p:tgtEl>
+                    <p:sldTgt/>
+                  </p:tgtEl>
+                </p:cond>
+              </p:prevCondLst>
+              <p:nextCondLst>
+                <p:cond evt="onNext" delay="0">
+                  <p:tgtEl>
+                    <p:sldTgt/>
+                  </p:tgtEl>
+                </p:cond>
+              </p:nextCondLst>
+            </p:seq>
+          </p:childTnLst>
+        </p:cTn>
+      </p:par>
+    </p:tnLst>
+  </p:timing>
 </p:sld>
 </file>
 
@@ -6075,6 +7039,314 @@
   <p:clrMapOvr>
     <a:masterClrMapping/>
   </p:clrMapOvr>
+  <p:timing>
+    <p:tnLst>
+      <p:par>
+        <p:cTn id="1" dur="indefinite" restart="never" nodeType="tmRoot">
+          <p:childTnLst>
+            <p:seq concurrent="1" nextAc="seek">
+              <p:cTn id="2" dur="indefinite" nodeType="mainSeq">
+                <p:childTnLst>
+                  <p:par>
+                    <p:cTn id="3" fill="hold">
+                      <p:stCondLst>
+                        <p:cond delay="indefinite"/>
+                      </p:stCondLst>
+                      <p:childTnLst>
+                        <p:par>
+                          <p:cTn id="4" fill="hold">
+                            <p:stCondLst>
+                              <p:cond delay="0"/>
+                            </p:stCondLst>
+                            <p:childTnLst>
+                              <p:par>
+                                <p:cTn id="5" presetID="10" presetClass="entr" presetSubtype="0" fill="hold" nodeType="clickEffect">
+                                  <p:stCondLst>
+                                    <p:cond delay="0"/>
+                                  </p:stCondLst>
+                                  <p:childTnLst>
+                                    <p:set>
+                                      <p:cBhvr>
+                                        <p:cTn id="6" dur="1" fill="hold">
+                                          <p:stCondLst>
+                                            <p:cond delay="0"/>
+                                          </p:stCondLst>
+                                        </p:cTn>
+                                        <p:tgtEl>
+                                          <p:spTgt spid="3">
+                                            <p:txEl>
+                                              <p:pRg st="0" end="0"/>
+                                            </p:txEl>
+                                          </p:spTgt>
+                                        </p:tgtEl>
+                                        <p:attrNameLst>
+                                          <p:attrName>style.visibility</p:attrName>
+                                        </p:attrNameLst>
+                                      </p:cBhvr>
+                                      <p:to>
+                                        <p:strVal val="visible"/>
+                                      </p:to>
+                                    </p:set>
+                                    <p:animEffect transition="in" filter="fade">
+                                      <p:cBhvr>
+                                        <p:cTn id="7" dur="500"/>
+                                        <p:tgtEl>
+                                          <p:spTgt spid="3">
+                                            <p:txEl>
+                                              <p:pRg st="0" end="0"/>
+                                            </p:txEl>
+                                          </p:spTgt>
+                                        </p:tgtEl>
+                                      </p:cBhvr>
+                                    </p:animEffect>
+                                  </p:childTnLst>
+                                </p:cTn>
+                              </p:par>
+                            </p:childTnLst>
+                          </p:cTn>
+                        </p:par>
+                      </p:childTnLst>
+                    </p:cTn>
+                  </p:par>
+                  <p:par>
+                    <p:cTn id="8" fill="hold">
+                      <p:stCondLst>
+                        <p:cond delay="indefinite"/>
+                      </p:stCondLst>
+                      <p:childTnLst>
+                        <p:par>
+                          <p:cTn id="9" fill="hold">
+                            <p:stCondLst>
+                              <p:cond delay="0"/>
+                            </p:stCondLst>
+                            <p:childTnLst>
+                              <p:par>
+                                <p:cTn id="10" presetID="10" presetClass="entr" presetSubtype="0" fill="hold" nodeType="clickEffect">
+                                  <p:stCondLst>
+                                    <p:cond delay="0"/>
+                                  </p:stCondLst>
+                                  <p:childTnLst>
+                                    <p:set>
+                                      <p:cBhvr>
+                                        <p:cTn id="11" dur="1" fill="hold">
+                                          <p:stCondLst>
+                                            <p:cond delay="0"/>
+                                          </p:stCondLst>
+                                        </p:cTn>
+                                        <p:tgtEl>
+                                          <p:spTgt spid="3">
+                                            <p:txEl>
+                                              <p:pRg st="1" end="1"/>
+                                            </p:txEl>
+                                          </p:spTgt>
+                                        </p:tgtEl>
+                                        <p:attrNameLst>
+                                          <p:attrName>style.visibility</p:attrName>
+                                        </p:attrNameLst>
+                                      </p:cBhvr>
+                                      <p:to>
+                                        <p:strVal val="visible"/>
+                                      </p:to>
+                                    </p:set>
+                                    <p:animEffect transition="in" filter="fade">
+                                      <p:cBhvr>
+                                        <p:cTn id="12" dur="500"/>
+                                        <p:tgtEl>
+                                          <p:spTgt spid="3">
+                                            <p:txEl>
+                                              <p:pRg st="1" end="1"/>
+                                            </p:txEl>
+                                          </p:spTgt>
+                                        </p:tgtEl>
+                                      </p:cBhvr>
+                                    </p:animEffect>
+                                  </p:childTnLst>
+                                </p:cTn>
+                              </p:par>
+                            </p:childTnLst>
+                          </p:cTn>
+                        </p:par>
+                        <p:par>
+                          <p:cTn id="13" fill="hold">
+                            <p:stCondLst>
+                              <p:cond delay="500"/>
+                            </p:stCondLst>
+                            <p:childTnLst>
+                              <p:par>
+                                <p:cTn id="14" presetID="10" presetClass="entr" presetSubtype="0" fill="hold" nodeType="afterEffect">
+                                  <p:stCondLst>
+                                    <p:cond delay="0"/>
+                                  </p:stCondLst>
+                                  <p:childTnLst>
+                                    <p:set>
+                                      <p:cBhvr>
+                                        <p:cTn id="15" dur="1" fill="hold">
+                                          <p:stCondLst>
+                                            <p:cond delay="0"/>
+                                          </p:stCondLst>
+                                        </p:cTn>
+                                        <p:tgtEl>
+                                          <p:spTgt spid="3">
+                                            <p:txEl>
+                                              <p:pRg st="2" end="2"/>
+                                            </p:txEl>
+                                          </p:spTgt>
+                                        </p:tgtEl>
+                                        <p:attrNameLst>
+                                          <p:attrName>style.visibility</p:attrName>
+                                        </p:attrNameLst>
+                                      </p:cBhvr>
+                                      <p:to>
+                                        <p:strVal val="visible"/>
+                                      </p:to>
+                                    </p:set>
+                                    <p:animEffect transition="in" filter="fade">
+                                      <p:cBhvr>
+                                        <p:cTn id="16" dur="500"/>
+                                        <p:tgtEl>
+                                          <p:spTgt spid="3">
+                                            <p:txEl>
+                                              <p:pRg st="2" end="2"/>
+                                            </p:txEl>
+                                          </p:spTgt>
+                                        </p:tgtEl>
+                                      </p:cBhvr>
+                                    </p:animEffect>
+                                  </p:childTnLst>
+                                </p:cTn>
+                              </p:par>
+                            </p:childTnLst>
+                          </p:cTn>
+                        </p:par>
+                        <p:par>
+                          <p:cTn id="17" fill="hold">
+                            <p:stCondLst>
+                              <p:cond delay="1000"/>
+                            </p:stCondLst>
+                            <p:childTnLst>
+                              <p:par>
+                                <p:cTn id="18" presetID="10" presetClass="entr" presetSubtype="0" fill="hold" nodeType="afterEffect">
+                                  <p:stCondLst>
+                                    <p:cond delay="0"/>
+                                  </p:stCondLst>
+                                  <p:childTnLst>
+                                    <p:set>
+                                      <p:cBhvr>
+                                        <p:cTn id="19" dur="1" fill="hold">
+                                          <p:stCondLst>
+                                            <p:cond delay="0"/>
+                                          </p:stCondLst>
+                                        </p:cTn>
+                                        <p:tgtEl>
+                                          <p:spTgt spid="3">
+                                            <p:txEl>
+                                              <p:pRg st="3" end="3"/>
+                                            </p:txEl>
+                                          </p:spTgt>
+                                        </p:tgtEl>
+                                        <p:attrNameLst>
+                                          <p:attrName>style.visibility</p:attrName>
+                                        </p:attrNameLst>
+                                      </p:cBhvr>
+                                      <p:to>
+                                        <p:strVal val="visible"/>
+                                      </p:to>
+                                    </p:set>
+                                    <p:animEffect transition="in" filter="fade">
+                                      <p:cBhvr>
+                                        <p:cTn id="20" dur="500"/>
+                                        <p:tgtEl>
+                                          <p:spTgt spid="3">
+                                            <p:txEl>
+                                              <p:pRg st="3" end="3"/>
+                                            </p:txEl>
+                                          </p:spTgt>
+                                        </p:tgtEl>
+                                      </p:cBhvr>
+                                    </p:animEffect>
+                                  </p:childTnLst>
+                                </p:cTn>
+                              </p:par>
+                            </p:childTnLst>
+                          </p:cTn>
+                        </p:par>
+                        <p:par>
+                          <p:cTn id="21" fill="hold">
+                            <p:stCondLst>
+                              <p:cond delay="1500"/>
+                            </p:stCondLst>
+                            <p:childTnLst>
+                              <p:par>
+                                <p:cTn id="22" presetID="10" presetClass="entr" presetSubtype="0" fill="hold" nodeType="afterEffect">
+                                  <p:stCondLst>
+                                    <p:cond delay="0"/>
+                                  </p:stCondLst>
+                                  <p:childTnLst>
+                                    <p:set>
+                                      <p:cBhvr>
+                                        <p:cTn id="23" dur="1" fill="hold">
+                                          <p:stCondLst>
+                                            <p:cond delay="0"/>
+                                          </p:stCondLst>
+                                        </p:cTn>
+                                        <p:tgtEl>
+                                          <p:spTgt spid="3">
+                                            <p:txEl>
+                                              <p:pRg st="4" end="4"/>
+                                            </p:txEl>
+                                          </p:spTgt>
+                                        </p:tgtEl>
+                                        <p:attrNameLst>
+                                          <p:attrName>style.visibility</p:attrName>
+                                        </p:attrNameLst>
+                                      </p:cBhvr>
+                                      <p:to>
+                                        <p:strVal val="visible"/>
+                                      </p:to>
+                                    </p:set>
+                                    <p:animEffect transition="in" filter="fade">
+                                      <p:cBhvr>
+                                        <p:cTn id="24" dur="500"/>
+                                        <p:tgtEl>
+                                          <p:spTgt spid="3">
+                                            <p:txEl>
+                                              <p:pRg st="4" end="4"/>
+                                            </p:txEl>
+                                          </p:spTgt>
+                                        </p:tgtEl>
+                                      </p:cBhvr>
+                                    </p:animEffect>
+                                  </p:childTnLst>
+                                </p:cTn>
+                              </p:par>
+                            </p:childTnLst>
+                          </p:cTn>
+                        </p:par>
+                      </p:childTnLst>
+                    </p:cTn>
+                  </p:par>
+                </p:childTnLst>
+              </p:cTn>
+              <p:prevCondLst>
+                <p:cond evt="onPrev" delay="0">
+                  <p:tgtEl>
+                    <p:sldTgt/>
+                  </p:tgtEl>
+                </p:cond>
+              </p:prevCondLst>
+              <p:nextCondLst>
+                <p:cond evt="onNext" delay="0">
+                  <p:tgtEl>
+                    <p:sldTgt/>
+                  </p:tgtEl>
+                </p:cond>
+              </p:nextCondLst>
+            </p:seq>
+          </p:childTnLst>
+        </p:cTn>
+      </p:par>
+    </p:tnLst>
+  </p:timing>
 </p:sld>
 </file>
 
@@ -6186,13 +7458,13 @@
         </p:nvSpPr>
         <p:spPr>
           <a:xfrm>
-            <a:off x="838200" y="1690688"/>
-            <a:ext cx="10515600" cy="4965701"/>
+            <a:off x="838200" y="1517431"/>
+            <a:ext cx="10515600" cy="5114375"/>
           </a:xfrm>
         </p:spPr>
         <p:txBody>
           <a:bodyPr>
-            <a:normAutofit lnSpcReduction="10000"/>
+            <a:normAutofit/>
           </a:bodyPr>
           <a:lstStyle/>
           <a:p>
@@ -6245,6 +7517,10 @@
               <a:buFont typeface="+mj-lt"/>
               <a:buAutoNum type="alphaUcPeriod"/>
             </a:pPr>
+            <a:r>
+              <a:rPr lang="en-US" sz="2400" dirty="0"/>
+              <a:t>《</a:t>
+            </a:r>
             <a:r>
               <a:rPr lang="en-US" sz="2400" dirty="0" err="1"/>
               <a:t>侏羅紀公園》中，眾人發現電網失效、圍欄破損，地面還留下巨大腳印，因此推測暴龍可能已經逃出園區</a:t>
@@ -6308,6 +7584,314 @@
   <p:clrMapOvr>
     <a:masterClrMapping/>
   </p:clrMapOvr>
+  <p:timing>
+    <p:tnLst>
+      <p:par>
+        <p:cTn id="1" dur="indefinite" restart="never" nodeType="tmRoot">
+          <p:childTnLst>
+            <p:seq concurrent="1" nextAc="seek">
+              <p:cTn id="2" dur="indefinite" nodeType="mainSeq">
+                <p:childTnLst>
+                  <p:par>
+                    <p:cTn id="3" fill="hold">
+                      <p:stCondLst>
+                        <p:cond delay="indefinite"/>
+                      </p:stCondLst>
+                      <p:childTnLst>
+                        <p:par>
+                          <p:cTn id="4" fill="hold">
+                            <p:stCondLst>
+                              <p:cond delay="0"/>
+                            </p:stCondLst>
+                            <p:childTnLst>
+                              <p:par>
+                                <p:cTn id="5" presetID="10" presetClass="entr" presetSubtype="0" fill="hold" nodeType="clickEffect">
+                                  <p:stCondLst>
+                                    <p:cond delay="0"/>
+                                  </p:stCondLst>
+                                  <p:childTnLst>
+                                    <p:set>
+                                      <p:cBhvr>
+                                        <p:cTn id="6" dur="1" fill="hold">
+                                          <p:stCondLst>
+                                            <p:cond delay="0"/>
+                                          </p:stCondLst>
+                                        </p:cTn>
+                                        <p:tgtEl>
+                                          <p:spTgt spid="3">
+                                            <p:txEl>
+                                              <p:pRg st="0" end="0"/>
+                                            </p:txEl>
+                                          </p:spTgt>
+                                        </p:tgtEl>
+                                        <p:attrNameLst>
+                                          <p:attrName>style.visibility</p:attrName>
+                                        </p:attrNameLst>
+                                      </p:cBhvr>
+                                      <p:to>
+                                        <p:strVal val="visible"/>
+                                      </p:to>
+                                    </p:set>
+                                    <p:animEffect transition="in" filter="fade">
+                                      <p:cBhvr>
+                                        <p:cTn id="7" dur="500"/>
+                                        <p:tgtEl>
+                                          <p:spTgt spid="3">
+                                            <p:txEl>
+                                              <p:pRg st="0" end="0"/>
+                                            </p:txEl>
+                                          </p:spTgt>
+                                        </p:tgtEl>
+                                      </p:cBhvr>
+                                    </p:animEffect>
+                                  </p:childTnLst>
+                                </p:cTn>
+                              </p:par>
+                            </p:childTnLst>
+                          </p:cTn>
+                        </p:par>
+                      </p:childTnLst>
+                    </p:cTn>
+                  </p:par>
+                  <p:par>
+                    <p:cTn id="8" fill="hold">
+                      <p:stCondLst>
+                        <p:cond delay="indefinite"/>
+                      </p:stCondLst>
+                      <p:childTnLst>
+                        <p:par>
+                          <p:cTn id="9" fill="hold">
+                            <p:stCondLst>
+                              <p:cond delay="0"/>
+                            </p:stCondLst>
+                            <p:childTnLst>
+                              <p:par>
+                                <p:cTn id="10" presetID="10" presetClass="entr" presetSubtype="0" fill="hold" nodeType="clickEffect">
+                                  <p:stCondLst>
+                                    <p:cond delay="0"/>
+                                  </p:stCondLst>
+                                  <p:childTnLst>
+                                    <p:set>
+                                      <p:cBhvr>
+                                        <p:cTn id="11" dur="1" fill="hold">
+                                          <p:stCondLst>
+                                            <p:cond delay="0"/>
+                                          </p:stCondLst>
+                                        </p:cTn>
+                                        <p:tgtEl>
+                                          <p:spTgt spid="3">
+                                            <p:txEl>
+                                              <p:pRg st="1" end="1"/>
+                                            </p:txEl>
+                                          </p:spTgt>
+                                        </p:tgtEl>
+                                        <p:attrNameLst>
+                                          <p:attrName>style.visibility</p:attrName>
+                                        </p:attrNameLst>
+                                      </p:cBhvr>
+                                      <p:to>
+                                        <p:strVal val="visible"/>
+                                      </p:to>
+                                    </p:set>
+                                    <p:animEffect transition="in" filter="fade">
+                                      <p:cBhvr>
+                                        <p:cTn id="12" dur="500"/>
+                                        <p:tgtEl>
+                                          <p:spTgt spid="3">
+                                            <p:txEl>
+                                              <p:pRg st="1" end="1"/>
+                                            </p:txEl>
+                                          </p:spTgt>
+                                        </p:tgtEl>
+                                      </p:cBhvr>
+                                    </p:animEffect>
+                                  </p:childTnLst>
+                                </p:cTn>
+                              </p:par>
+                            </p:childTnLst>
+                          </p:cTn>
+                        </p:par>
+                        <p:par>
+                          <p:cTn id="13" fill="hold">
+                            <p:stCondLst>
+                              <p:cond delay="500"/>
+                            </p:stCondLst>
+                            <p:childTnLst>
+                              <p:par>
+                                <p:cTn id="14" presetID="10" presetClass="entr" presetSubtype="0" fill="hold" nodeType="afterEffect">
+                                  <p:stCondLst>
+                                    <p:cond delay="0"/>
+                                  </p:stCondLst>
+                                  <p:childTnLst>
+                                    <p:set>
+                                      <p:cBhvr>
+                                        <p:cTn id="15" dur="1" fill="hold">
+                                          <p:stCondLst>
+                                            <p:cond delay="0"/>
+                                          </p:stCondLst>
+                                        </p:cTn>
+                                        <p:tgtEl>
+                                          <p:spTgt spid="3">
+                                            <p:txEl>
+                                              <p:pRg st="2" end="2"/>
+                                            </p:txEl>
+                                          </p:spTgt>
+                                        </p:tgtEl>
+                                        <p:attrNameLst>
+                                          <p:attrName>style.visibility</p:attrName>
+                                        </p:attrNameLst>
+                                      </p:cBhvr>
+                                      <p:to>
+                                        <p:strVal val="visible"/>
+                                      </p:to>
+                                    </p:set>
+                                    <p:animEffect transition="in" filter="fade">
+                                      <p:cBhvr>
+                                        <p:cTn id="16" dur="500"/>
+                                        <p:tgtEl>
+                                          <p:spTgt spid="3">
+                                            <p:txEl>
+                                              <p:pRg st="2" end="2"/>
+                                            </p:txEl>
+                                          </p:spTgt>
+                                        </p:tgtEl>
+                                      </p:cBhvr>
+                                    </p:animEffect>
+                                  </p:childTnLst>
+                                </p:cTn>
+                              </p:par>
+                            </p:childTnLst>
+                          </p:cTn>
+                        </p:par>
+                        <p:par>
+                          <p:cTn id="17" fill="hold">
+                            <p:stCondLst>
+                              <p:cond delay="1000"/>
+                            </p:stCondLst>
+                            <p:childTnLst>
+                              <p:par>
+                                <p:cTn id="18" presetID="10" presetClass="entr" presetSubtype="0" fill="hold" nodeType="afterEffect">
+                                  <p:stCondLst>
+                                    <p:cond delay="0"/>
+                                  </p:stCondLst>
+                                  <p:childTnLst>
+                                    <p:set>
+                                      <p:cBhvr>
+                                        <p:cTn id="19" dur="1" fill="hold">
+                                          <p:stCondLst>
+                                            <p:cond delay="0"/>
+                                          </p:stCondLst>
+                                        </p:cTn>
+                                        <p:tgtEl>
+                                          <p:spTgt spid="3">
+                                            <p:txEl>
+                                              <p:pRg st="3" end="3"/>
+                                            </p:txEl>
+                                          </p:spTgt>
+                                        </p:tgtEl>
+                                        <p:attrNameLst>
+                                          <p:attrName>style.visibility</p:attrName>
+                                        </p:attrNameLst>
+                                      </p:cBhvr>
+                                      <p:to>
+                                        <p:strVal val="visible"/>
+                                      </p:to>
+                                    </p:set>
+                                    <p:animEffect transition="in" filter="fade">
+                                      <p:cBhvr>
+                                        <p:cTn id="20" dur="500"/>
+                                        <p:tgtEl>
+                                          <p:spTgt spid="3">
+                                            <p:txEl>
+                                              <p:pRg st="3" end="3"/>
+                                            </p:txEl>
+                                          </p:spTgt>
+                                        </p:tgtEl>
+                                      </p:cBhvr>
+                                    </p:animEffect>
+                                  </p:childTnLst>
+                                </p:cTn>
+                              </p:par>
+                            </p:childTnLst>
+                          </p:cTn>
+                        </p:par>
+                        <p:par>
+                          <p:cTn id="21" fill="hold">
+                            <p:stCondLst>
+                              <p:cond delay="1500"/>
+                            </p:stCondLst>
+                            <p:childTnLst>
+                              <p:par>
+                                <p:cTn id="22" presetID="10" presetClass="entr" presetSubtype="0" fill="hold" nodeType="afterEffect">
+                                  <p:stCondLst>
+                                    <p:cond delay="0"/>
+                                  </p:stCondLst>
+                                  <p:childTnLst>
+                                    <p:set>
+                                      <p:cBhvr>
+                                        <p:cTn id="23" dur="1" fill="hold">
+                                          <p:stCondLst>
+                                            <p:cond delay="0"/>
+                                          </p:stCondLst>
+                                        </p:cTn>
+                                        <p:tgtEl>
+                                          <p:spTgt spid="3">
+                                            <p:txEl>
+                                              <p:pRg st="4" end="4"/>
+                                            </p:txEl>
+                                          </p:spTgt>
+                                        </p:tgtEl>
+                                        <p:attrNameLst>
+                                          <p:attrName>style.visibility</p:attrName>
+                                        </p:attrNameLst>
+                                      </p:cBhvr>
+                                      <p:to>
+                                        <p:strVal val="visible"/>
+                                      </p:to>
+                                    </p:set>
+                                    <p:animEffect transition="in" filter="fade">
+                                      <p:cBhvr>
+                                        <p:cTn id="24" dur="500"/>
+                                        <p:tgtEl>
+                                          <p:spTgt spid="3">
+                                            <p:txEl>
+                                              <p:pRg st="4" end="4"/>
+                                            </p:txEl>
+                                          </p:spTgt>
+                                        </p:tgtEl>
+                                      </p:cBhvr>
+                                    </p:animEffect>
+                                  </p:childTnLst>
+                                </p:cTn>
+                              </p:par>
+                            </p:childTnLst>
+                          </p:cTn>
+                        </p:par>
+                      </p:childTnLst>
+                    </p:cTn>
+                  </p:par>
+                </p:childTnLst>
+              </p:cTn>
+              <p:prevCondLst>
+                <p:cond evt="onPrev" delay="0">
+                  <p:tgtEl>
+                    <p:sldTgt/>
+                  </p:tgtEl>
+                </p:cond>
+              </p:prevCondLst>
+              <p:nextCondLst>
+                <p:cond evt="onNext" delay="0">
+                  <p:tgtEl>
+                    <p:sldTgt/>
+                  </p:tgtEl>
+                </p:cond>
+              </p:nextCondLst>
+            </p:seq>
+          </p:childTnLst>
+        </p:cTn>
+      </p:par>
+    </p:tnLst>
+  </p:timing>
 </p:sld>
 </file>
 

--- a/teaching/xiufeng-jhs-grade9-summer2026/slides/01自然概論.pptx
+++ b/teaching/xiufeng-jhs-grade9-summer2026/slides/01自然概論.pptx
@@ -13,6 +13,7 @@
     <p:sldId id="261" r:id="rId7"/>
     <p:sldId id="262" r:id="rId8"/>
     <p:sldId id="263" r:id="rId9"/>
+    <p:sldId id="264" r:id="rId10"/>
   </p:sldIdLst>
   <p:sldSz cx="12192000" cy="6858000"/>
   <p:notesSz cx="6858000" cy="9144000"/>
@@ -132,8 +133,8 @@
 <pc:chgInfo xmlns:a="http://schemas.openxmlformats.org/drawingml/2006/main" xmlns:r="http://schemas.openxmlformats.org/officeDocument/2006/relationships" xmlns:ac="http://schemas.microsoft.com/office/drawing/2013/main/command" xmlns:pc="http://schemas.microsoft.com/office/powerpoint/2013/main/command">
   <pc:docChgLst>
     <pc:chgData name="banana fu" userId="ed976ac1ba8285c4" providerId="LiveId" clId="{88AF2FF6-62A1-469D-A392-D5D42FFB82F2}"/>
-    <pc:docChg chg="undo custSel addSld modSld">
-      <pc:chgData name="banana fu" userId="ed976ac1ba8285c4" providerId="LiveId" clId="{88AF2FF6-62A1-469D-A392-D5D42FFB82F2}" dt="2026-07-26T23:51:39.737" v="2435"/>
+    <pc:docChg chg="undo custSel addSld delSld modSld">
+      <pc:chgData name="banana fu" userId="ed976ac1ba8285c4" providerId="LiveId" clId="{88AF2FF6-62A1-469D-A392-D5D42FFB82F2}" dt="2026-07-27T01:36:50.479" v="2534" actId="47"/>
       <pc:docMkLst>
         <pc:docMk/>
       </pc:docMkLst>
@@ -488,6 +489,44 @@
             <ac:spMk id="3" creationId="{1CE87120-FCCD-86E1-B61C-D773747741B1}"/>
           </ac:spMkLst>
         </pc:spChg>
+      </pc:sldChg>
+      <pc:sldChg chg="addSp modSp new mod">
+        <pc:chgData name="banana fu" userId="ed976ac1ba8285c4" providerId="LiveId" clId="{88AF2FF6-62A1-469D-A392-D5D42FFB82F2}" dt="2026-07-27T01:33:10.174" v="2533" actId="20577"/>
+        <pc:sldMkLst>
+          <pc:docMk/>
+          <pc:sldMk cId="4322411" sldId="264"/>
+        </pc:sldMkLst>
+        <pc:spChg chg="mod">
+          <ac:chgData name="banana fu" userId="ed976ac1ba8285c4" providerId="LiveId" clId="{88AF2FF6-62A1-469D-A392-D5D42FFB82F2}" dt="2026-07-27T01:27:15.947" v="2476" actId="113"/>
+          <ac:spMkLst>
+            <pc:docMk/>
+            <pc:sldMk cId="4322411" sldId="264"/>
+            <ac:spMk id="2" creationId="{1496A786-E26F-4FE3-15ED-8EDC5E373286}"/>
+          </ac:spMkLst>
+        </pc:spChg>
+        <pc:spChg chg="mod">
+          <ac:chgData name="banana fu" userId="ed976ac1ba8285c4" providerId="LiveId" clId="{88AF2FF6-62A1-469D-A392-D5D42FFB82F2}" dt="2026-07-27T01:33:10.174" v="2533" actId="20577"/>
+          <ac:spMkLst>
+            <pc:docMk/>
+            <pc:sldMk cId="4322411" sldId="264"/>
+            <ac:spMk id="3" creationId="{94B3494E-91D6-69F1-8BB2-EAFD97749CDC}"/>
+          </ac:spMkLst>
+        </pc:spChg>
+        <pc:picChg chg="add mod ord">
+          <ac:chgData name="banana fu" userId="ed976ac1ba8285c4" providerId="LiveId" clId="{88AF2FF6-62A1-469D-A392-D5D42FFB82F2}" dt="2026-07-27T01:23:36.185" v="2439" actId="167"/>
+          <ac:picMkLst>
+            <pc:docMk/>
+            <pc:sldMk cId="4322411" sldId="264"/>
+            <ac:picMk id="5" creationId="{BF98D990-B8E0-921F-C31C-56400F647A14}"/>
+          </ac:picMkLst>
+        </pc:picChg>
+      </pc:sldChg>
+      <pc:sldChg chg="add del">
+        <pc:chgData name="banana fu" userId="ed976ac1ba8285c4" providerId="LiveId" clId="{88AF2FF6-62A1-469D-A392-D5D42FFB82F2}" dt="2026-07-27T01:36:50.479" v="2534" actId="47"/>
+        <pc:sldMkLst>
+          <pc:docMk/>
+          <pc:sldMk cId="703553357" sldId="265"/>
+        </pc:sldMkLst>
       </pc:sldChg>
     </pc:docChg>
   </pc:docChgLst>
@@ -7895,6 +7934,191 @@
 </p:sld>
 </file>
 
+<file path=ppt/slides/slide9.xml><?xml version="1.0" encoding="utf-8"?>
+<p:sld xmlns:a="http://schemas.openxmlformats.org/drawingml/2006/main" xmlns:r="http://schemas.openxmlformats.org/officeDocument/2006/relationships" xmlns:p="http://schemas.openxmlformats.org/presentationml/2006/main">
+  <p:cSld>
+    <p:spTree>
+      <p:nvGrpSpPr>
+        <p:cNvPr id="1" name=""/>
+        <p:cNvGrpSpPr/>
+        <p:nvPr/>
+      </p:nvGrpSpPr>
+      <p:grpSpPr>
+        <a:xfrm>
+          <a:off x="0" y="0"/>
+          <a:ext cx="0" cy="0"/>
+          <a:chOff x="0" y="0"/>
+          <a:chExt cx="0" cy="0"/>
+        </a:xfrm>
+      </p:grpSpPr>
+      <p:pic>
+        <p:nvPicPr>
+          <p:cNvPr id="5" name="圖片 4">
+            <a:extLst>
+              <a:ext uri="{FF2B5EF4-FFF2-40B4-BE49-F238E27FC236}">
+                <a16:creationId xmlns:a16="http://schemas.microsoft.com/office/drawing/2014/main" id="{BF98D990-B8E0-921F-C31C-56400F647A14}"/>
+              </a:ext>
+            </a:extLst>
+          </p:cNvPr>
+          <p:cNvPicPr>
+            <a:picLocks noGrp="1" noRot="1" noMove="1" noResize="1" noEditPoints="1" noAdjustHandles="1" noChangeArrowheads="1" noChangeShapeType="1" noCrop="1"/>
+          </p:cNvPicPr>
+          <p:nvPr/>
+        </p:nvPicPr>
+        <p:blipFill>
+          <a:blip r:embed="rId2">
+            <a:alphaModFix amt="20000"/>
+            <a:extLst>
+              <a:ext uri="{28A0092B-C50C-407E-A947-70E740481C1C}">
+                <a14:useLocalDpi xmlns:a14="http://schemas.microsoft.com/office/drawing/2010/main" val="0"/>
+              </a:ext>
+            </a:extLst>
+          </a:blip>
+          <a:srcRect l="12838" r="1703"/>
+          <a:stretch>
+            <a:fillRect/>
+          </a:stretch>
+        </p:blipFill>
+        <p:spPr>
+          <a:xfrm rot="16200000">
+            <a:off x="2666999" y="-2667001"/>
+            <a:ext cx="6858001" cy="12192000"/>
+          </a:xfrm>
+          <a:prstGeom prst="rect">
+            <a:avLst/>
+          </a:prstGeom>
+        </p:spPr>
+      </p:pic>
+      <p:sp>
+        <p:nvSpPr>
+          <p:cNvPr id="2" name="標題 1">
+            <a:extLst>
+              <a:ext uri="{FF2B5EF4-FFF2-40B4-BE49-F238E27FC236}">
+                <a16:creationId xmlns:a16="http://schemas.microsoft.com/office/drawing/2014/main" id="{1496A786-E26F-4FE3-15ED-8EDC5E373286}"/>
+              </a:ext>
+            </a:extLst>
+          </p:cNvPr>
+          <p:cNvSpPr>
+            <a:spLocks noGrp="1"/>
+          </p:cNvSpPr>
+          <p:nvPr>
+            <p:ph type="title"/>
+          </p:nvPr>
+        </p:nvSpPr>
+        <p:spPr/>
+        <p:txBody>
+          <a:bodyPr/>
+          <a:lstStyle/>
+          <a:p>
+            <a:r>
+              <a:rPr lang="zh-TW" altLang="en-US" b="1" dirty="0"/>
+              <a:t>氣象署資料怎麼看？</a:t>
+            </a:r>
+            <a:endParaRPr lang="en-US" b="1" dirty="0"/>
+          </a:p>
+        </p:txBody>
+      </p:sp>
+      <p:sp>
+        <p:nvSpPr>
+          <p:cNvPr id="3" name="內容版面配置區 2">
+            <a:extLst>
+              <a:ext uri="{FF2B5EF4-FFF2-40B4-BE49-F238E27FC236}">
+                <a16:creationId xmlns:a16="http://schemas.microsoft.com/office/drawing/2014/main" id="{94B3494E-91D6-69F1-8BB2-EAFD97749CDC}"/>
+              </a:ext>
+            </a:extLst>
+          </p:cNvPr>
+          <p:cNvSpPr>
+            <a:spLocks noGrp="1"/>
+          </p:cNvSpPr>
+          <p:nvPr>
+            <p:ph idx="1"/>
+          </p:nvPr>
+        </p:nvSpPr>
+        <p:spPr/>
+        <p:txBody>
+          <a:bodyPr/>
+          <a:lstStyle/>
+          <a:p>
+            <a:pPr>
+              <a:lnSpc>
+                <a:spcPct val="150000"/>
+              </a:lnSpc>
+              <a:buFont typeface="Wingdings" panose="05000000000000000000" pitchFamily="2" charset="2"/>
+              <a:buChar char="Ø"/>
+            </a:pPr>
+            <a:r>
+              <a:rPr lang="zh-TW" altLang="en-US" dirty="0"/>
+              <a:t>颱風</a:t>
+            </a:r>
+            <a:endParaRPr lang="en-US" altLang="zh-TW" dirty="0"/>
+          </a:p>
+          <a:p>
+            <a:pPr>
+              <a:lnSpc>
+                <a:spcPct val="150000"/>
+              </a:lnSpc>
+              <a:buFont typeface="Wingdings" panose="05000000000000000000" pitchFamily="2" charset="2"/>
+              <a:buChar char="Ø"/>
+            </a:pPr>
+            <a:r>
+              <a:rPr lang="zh-TW" altLang="en-US" dirty="0"/>
+              <a:t>地震</a:t>
+            </a:r>
+            <a:endParaRPr lang="en-US" altLang="zh-TW" dirty="0"/>
+          </a:p>
+          <a:p>
+            <a:pPr>
+              <a:lnSpc>
+                <a:spcPct val="150000"/>
+              </a:lnSpc>
+              <a:buFont typeface="Wingdings" panose="05000000000000000000" pitchFamily="2" charset="2"/>
+              <a:buChar char="Ø"/>
+            </a:pPr>
+            <a:r>
+              <a:rPr lang="zh-TW" altLang="en-US" dirty="0"/>
+              <a:t>豪雨特報</a:t>
+            </a:r>
+            <a:endParaRPr lang="en-US" altLang="zh-TW" dirty="0"/>
+          </a:p>
+          <a:p>
+            <a:pPr>
+              <a:lnSpc>
+                <a:spcPct val="150000"/>
+              </a:lnSpc>
+              <a:buFont typeface="Wingdings" panose="05000000000000000000" pitchFamily="2" charset="2"/>
+              <a:buChar char="Ø"/>
+            </a:pPr>
+            <a:r>
+              <a:rPr lang="zh-TW" altLang="en-US" dirty="0"/>
+              <a:t>其他氣象資料</a:t>
+            </a:r>
+            <a:endParaRPr lang="en-US" altLang="zh-TW" dirty="0"/>
+          </a:p>
+          <a:p>
+            <a:pPr>
+              <a:lnSpc>
+                <a:spcPct val="150000"/>
+              </a:lnSpc>
+              <a:buFont typeface="Wingdings" panose="05000000000000000000" pitchFamily="2" charset="2"/>
+              <a:buChar char="Ø"/>
+            </a:pPr>
+            <a:endParaRPr lang="en-US" dirty="0"/>
+          </a:p>
+        </p:txBody>
+      </p:sp>
+    </p:spTree>
+    <p:extLst>
+      <p:ext uri="{BB962C8B-B14F-4D97-AF65-F5344CB8AC3E}">
+        <p14:creationId xmlns:p14="http://schemas.microsoft.com/office/powerpoint/2010/main" val="4322411"/>
+      </p:ext>
+    </p:extLst>
+  </p:cSld>
+  <p:clrMapOvr>
+    <a:masterClrMapping/>
+  </p:clrMapOvr>
+</p:sld>
+</file>
+
 <file path=ppt/theme/theme1.xml><?xml version="1.0" encoding="utf-8"?>
 <a:theme xmlns:a="http://schemas.openxmlformats.org/drawingml/2006/main" name="Office 佈景主題">
   <a:themeElements>
